--- a/Apresentação/Poppy and Max 5ªEntrega.pptx
+++ b/Apresentação/Poppy and Max 5ªEntrega.pptx
@@ -5390,7 +5390,7 @@
               </a:lnSpc>
             </a:pPr>
             <a:r>
-              <a:rPr lang="en-US" sz="4400" b="1">
+              <a:rPr lang="en-US" sz="4400" b="1" dirty="0">
                 <a:solidFill>
                   <a:srgbClr val="000000"/>
                 </a:solidFill>
@@ -5399,7 +5399,7 @@
                 <a:cs typeface="Open Sans 1 Bold"/>
                 <a:sym typeface="Open Sans 1 Bold"/>
               </a:rPr>
-              <a:t>Flyres</a:t>
+              <a:t>Flyers</a:t>
             </a:r>
           </a:p>
         </p:txBody>
@@ -5989,7 +5989,7 @@
               </a:lnSpc>
             </a:pPr>
             <a:r>
-              <a:rPr lang="en-US" sz="4400" b="1">
+              <a:rPr lang="en-US" sz="4400" b="1" dirty="0">
                 <a:solidFill>
                   <a:srgbClr val="000000"/>
                 </a:solidFill>
@@ -5998,7 +5998,7 @@
                 <a:cs typeface="Open Sans 1 Bold"/>
                 <a:sym typeface="Open Sans 1 Bold"/>
               </a:rPr>
-              <a:t>Flyres</a:t>
+              <a:t>Flyers</a:t>
             </a:r>
           </a:p>
         </p:txBody>
